--- a/2.Texto/Imag/fig_conversion_unidades.pptx
+++ b/2.Texto/Imag/fig_conversion_unidades.pptx
@@ -104,6 +104,11 @@
       </a:defRPr>
     </a:lvl9pPr>
   </p:defaultTextStyle>
+  <p:extLst>
+    <p:ext uri="{EFAFB233-063F-42B5-8137-9DF3F51BA10A}">
+      <p15:sldGuideLst xmlns:p15="http://schemas.microsoft.com/office/powerpoint/2012/main"/>
+    </p:ext>
+  </p:extLst>
 </p:presentation>
 </file>
 
@@ -238,7 +243,7 @@
           <a:p>
             <a:fld id="{65BEEF29-65E2-4860-8EEC-91BEA05EDC17}" type="datetimeFigureOut">
               <a:rPr lang="en-US" smtClean="0"/>
-              <a:t>3/25/2026</a:t>
+              <a:t>5/21/2026</a:t>
             </a:fld>
             <a:endParaRPr lang="en-US"/>
           </a:p>
@@ -408,7 +413,7 @@
           <a:p>
             <a:fld id="{65BEEF29-65E2-4860-8EEC-91BEA05EDC17}" type="datetimeFigureOut">
               <a:rPr lang="en-US" smtClean="0"/>
-              <a:t>3/25/2026</a:t>
+              <a:t>5/21/2026</a:t>
             </a:fld>
             <a:endParaRPr lang="en-US"/>
           </a:p>
@@ -588,7 +593,7 @@
           <a:p>
             <a:fld id="{65BEEF29-65E2-4860-8EEC-91BEA05EDC17}" type="datetimeFigureOut">
               <a:rPr lang="en-US" smtClean="0"/>
-              <a:t>3/25/2026</a:t>
+              <a:t>5/21/2026</a:t>
             </a:fld>
             <a:endParaRPr lang="en-US"/>
           </a:p>
@@ -758,7 +763,7 @@
           <a:p>
             <a:fld id="{65BEEF29-65E2-4860-8EEC-91BEA05EDC17}" type="datetimeFigureOut">
               <a:rPr lang="en-US" smtClean="0"/>
-              <a:t>3/25/2026</a:t>
+              <a:t>5/21/2026</a:t>
             </a:fld>
             <a:endParaRPr lang="en-US"/>
           </a:p>
@@ -1004,7 +1009,7 @@
           <a:p>
             <a:fld id="{65BEEF29-65E2-4860-8EEC-91BEA05EDC17}" type="datetimeFigureOut">
               <a:rPr lang="en-US" smtClean="0"/>
-              <a:t>3/25/2026</a:t>
+              <a:t>5/21/2026</a:t>
             </a:fld>
             <a:endParaRPr lang="en-US"/>
           </a:p>
@@ -1236,7 +1241,7 @@
           <a:p>
             <a:fld id="{65BEEF29-65E2-4860-8EEC-91BEA05EDC17}" type="datetimeFigureOut">
               <a:rPr lang="en-US" smtClean="0"/>
-              <a:t>3/25/2026</a:t>
+              <a:t>5/21/2026</a:t>
             </a:fld>
             <a:endParaRPr lang="en-US"/>
           </a:p>
@@ -1603,7 +1608,7 @@
           <a:p>
             <a:fld id="{65BEEF29-65E2-4860-8EEC-91BEA05EDC17}" type="datetimeFigureOut">
               <a:rPr lang="en-US" smtClean="0"/>
-              <a:t>3/25/2026</a:t>
+              <a:t>5/21/2026</a:t>
             </a:fld>
             <a:endParaRPr lang="en-US"/>
           </a:p>
@@ -1721,7 +1726,7 @@
           <a:p>
             <a:fld id="{65BEEF29-65E2-4860-8EEC-91BEA05EDC17}" type="datetimeFigureOut">
               <a:rPr lang="en-US" smtClean="0"/>
-              <a:t>3/25/2026</a:t>
+              <a:t>5/21/2026</a:t>
             </a:fld>
             <a:endParaRPr lang="en-US"/>
           </a:p>
@@ -1816,7 +1821,7 @@
           <a:p>
             <a:fld id="{65BEEF29-65E2-4860-8EEC-91BEA05EDC17}" type="datetimeFigureOut">
               <a:rPr lang="en-US" smtClean="0"/>
-              <a:t>3/25/2026</a:t>
+              <a:t>5/21/2026</a:t>
             </a:fld>
             <a:endParaRPr lang="en-US"/>
           </a:p>
@@ -2093,7 +2098,7 @@
           <a:p>
             <a:fld id="{65BEEF29-65E2-4860-8EEC-91BEA05EDC17}" type="datetimeFigureOut">
               <a:rPr lang="en-US" smtClean="0"/>
-              <a:t>3/25/2026</a:t>
+              <a:t>5/21/2026</a:t>
             </a:fld>
             <a:endParaRPr lang="en-US"/>
           </a:p>
@@ -2350,7 +2355,7 @@
           <a:p>
             <a:fld id="{65BEEF29-65E2-4860-8EEC-91BEA05EDC17}" type="datetimeFigureOut">
               <a:rPr lang="en-US" smtClean="0"/>
-              <a:t>3/25/2026</a:t>
+              <a:t>5/21/2026</a:t>
             </a:fld>
             <a:endParaRPr lang="en-US"/>
           </a:p>
@@ -2563,7 +2568,7 @@
           <a:p>
             <a:fld id="{65BEEF29-65E2-4860-8EEC-91BEA05EDC17}" type="datetimeFigureOut">
               <a:rPr lang="en-US" smtClean="0"/>
-              <a:t>3/25/2026</a:t>
+              <a:t>5/21/2026</a:t>
             </a:fld>
             <a:endParaRPr lang="en-US"/>
           </a:p>
@@ -3219,7 +3224,7 @@
           <a:p>
             <a:pPr algn="ctr"/>
             <a:r>
-              <a:rPr lang="en-US" sz="1200" i="1" dirty="0" err="1">
+              <a:rPr lang="en-US" sz="1200" i="1" dirty="0">
                 <a:solidFill>
                   <a:schemeClr val="tx1">
                     <a:lumMod val="50000"/>
@@ -3227,10 +3232,10 @@
                   </a:schemeClr>
                 </a:solidFill>
               </a:rPr>
-              <a:t>cmd</a:t>
-            </a:r>
-            <a:r>
-              <a:rPr lang="en-US" sz="1200" i="1" dirty="0">
+              <a:t>cmd = vel. angular de </a:t>
+            </a:r>
+            <a:r>
+              <a:rPr lang="en-US" sz="1200" i="1" dirty="0" err="1">
                 <a:solidFill>
                   <a:schemeClr val="tx1">
                     <a:lumMod val="50000"/>
@@ -3238,7 +3243,18 @@
                   </a:schemeClr>
                 </a:solidFill>
               </a:rPr>
-              <a:t> = vel. angular</a:t>
+              <a:t>rueda</a:t>
+            </a:r>
+            <a:r>
+              <a:rPr lang="en-US" sz="1200" i="1" dirty="0">
+                <a:solidFill>
+                  <a:schemeClr val="tx1">
+                    <a:lumMod val="50000"/>
+                    <a:lumOff val="50000"/>
+                  </a:schemeClr>
+                </a:solidFill>
+              </a:rPr>
+              <a:t> (joint)</a:t>
             </a:r>
           </a:p>
         </p:txBody>
@@ -3894,7 +3910,7 @@
                   <a:srgbClr val="7030A0"/>
                 </a:solidFill>
               </a:rPr>
-              <a:t>Constante compartida</a:t>
+              <a:t>Constante compartida conceptualmente</a:t>
             </a:r>
           </a:p>
           <a:p>
@@ -4190,7 +4206,7 @@
                   </a:schemeClr>
                 </a:solidFill>
               </a:rPr>
-              <a:t>calcEnAngle</a:t>
+              <a:t>calcEncAngle</a:t>
             </a:r>
             <a:r>
               <a:rPr lang="en-US" sz="1200" i="1" dirty="0">
@@ -5007,7 +5023,7 @@
         <p:spPr>
           <a:xfrm>
             <a:off x="5277140" y="5399639"/>
-            <a:ext cx="3629394" cy="646331"/>
+            <a:ext cx="4230218" cy="646331"/>
           </a:xfrm>
           <a:prstGeom prst="rect">
             <a:avLst/>
@@ -5116,7 +5132,7 @@
                   </a:schemeClr>
                 </a:solidFill>
               </a:rPr>
-              <a:t>               </a:t>
+              <a:t>                 </a:t>
             </a:r>
             <a:r>
               <a:rPr lang="es-ES" dirty="0" err="1">
@@ -5193,7 +5209,51 @@
                   </a:schemeClr>
                 </a:solidFill>
               </a:rPr>
-              <a:t>t</a:t>
+              <a:t>t (</a:t>
+            </a:r>
+            <a:r>
+              <a:rPr lang="es-ES" dirty="0" err="1">
+                <a:solidFill>
+                  <a:schemeClr val="tx2">
+                    <a:lumMod val="75000"/>
+                    <a:lumOff val="25000"/>
+                  </a:schemeClr>
+                </a:solidFill>
+              </a:rPr>
+              <a:t>backward</a:t>
+            </a:r>
+            <a:r>
+              <a:rPr lang="es-ES" dirty="0">
+                <a:solidFill>
+                  <a:schemeClr val="tx2">
+                    <a:lumMod val="75000"/>
+                    <a:lumOff val="25000"/>
+                  </a:schemeClr>
+                </a:solidFill>
+              </a:rPr>
+              <a:t> </a:t>
+            </a:r>
+            <a:r>
+              <a:rPr lang="es-ES" dirty="0" err="1">
+                <a:solidFill>
+                  <a:schemeClr val="tx2">
+                    <a:lumMod val="75000"/>
+                    <a:lumOff val="25000"/>
+                  </a:schemeClr>
+                </a:solidFill>
+              </a:rPr>
+              <a:t>diff</a:t>
+            </a:r>
+            <a:r>
+              <a:rPr lang="es-ES" dirty="0">
+                <a:solidFill>
+                  <a:schemeClr val="tx2">
+                    <a:lumMod val="75000"/>
+                    <a:lumOff val="25000"/>
+                  </a:schemeClr>
+                </a:solidFill>
+              </a:rPr>
+              <a:t>.)</a:t>
             </a:r>
           </a:p>
         </p:txBody>
